--- a/AI团队作业/大纲.pptx
+++ b/AI团队作业/大纲.pptx
@@ -4123,7 +4123,7 @@
           <a:bodyPr/>
           <a:lstStyle/>
           <a:p>
-            <a:endParaRPr lang="zh-CN" altLang="en-US"/>
+            <a:endParaRPr lang="zh-CN" altLang="en-US" dirty="0"/>
           </a:p>
         </p:txBody>
       </p:sp>
